--- a/system-design-101/vi/lessons/sd-02-028/slides/sd-02-028.pptx
+++ b/system-design-101/vi/lessons/sd-02-028/slides/sd-02-028.pptx
@@ -3486,7 +3486,7 @@
                         <a:t>Web</a:t>
                       </a:r>
                       <a:r>
-                        <a:rPr lang="en-US" sz="2250" dirty="0" spc="-4" kern="0">
+                        <a:rPr lang="en-US" sz="2250" dirty="0" spc="-19" kern="0">
                           <a:solidFill>
                             <a:srgbClr val="E4E1D8"/>
                           </a:solidFill>
@@ -3494,18 +3494,7 @@
                           <a:ea typeface="Be Vietnam Pro" pitchFamily="34" charset="-122"/>
                           <a:cs typeface="Be Vietnam Pro" pitchFamily="34" charset="-120"/>
                         </a:rPr>
-                        <a:t> Application</a:t>
-                      </a:r>
-                      <a:r>
-                        <a:rPr lang="en-US" sz="2250" dirty="0" spc="-24" kern="0">
-                          <a:solidFill>
-                            <a:srgbClr val="E4E1D8"/>
-                          </a:solidFill>
-                          <a:latin typeface="Be Vietnam Pro" pitchFamily="34" charset="0"/>
-                          <a:ea typeface="Be Vietnam Pro" pitchFamily="34" charset="-122"/>
-                          <a:cs typeface="Be Vietnam Pro" pitchFamily="34" charset="-120"/>
-                        </a:rPr>
-                        <a:t> Resource</a:t>
+                        <a:t> ARchive</a:t>
                       </a:r>
                       <a:endParaRPr lang="en-US" sz="1200" dirty="0"/>
                     </a:p>
@@ -3563,6 +3552,39 @@
                         <a:t>tệp</a:t>
                       </a:r>
                       <a:r>
+                        <a:rPr lang="en-US" sz="2250" dirty="0" spc="17" kern="0">
+                          <a:solidFill>
+                            <a:srgbClr val="E4E1D8"/>
+                          </a:solidFill>
+                          <a:latin typeface="Be Vietnam Pro" pitchFamily="34" charset="0"/>
+                          <a:ea typeface="Be Vietnam Pro" pitchFamily="34" charset="-122"/>
+                          <a:cs typeface="Be Vietnam Pro" pitchFamily="34" charset="-120"/>
+                        </a:rPr>
+                        <a:t> lưu</a:t>
+                      </a:r>
+                      <a:r>
+                        <a:rPr lang="en-US" sz="2250" dirty="0" spc="1" kern="0">
+                          <a:solidFill>
+                            <a:srgbClr val="E4E1D8"/>
+                          </a:solidFill>
+                          <a:latin typeface="Be Vietnam Pro" pitchFamily="34" charset="0"/>
+                          <a:ea typeface="Be Vietnam Pro" pitchFamily="34" charset="-122"/>
+                          <a:cs typeface="Be Vietnam Pro" pitchFamily="34" charset="-120"/>
+                        </a:rPr>
+                        <a:t> trữ</a:t>
+                      </a:r>
+                      <a:r>
+                        <a:rPr lang="en-US" sz="2250" dirty="0" spc="-8" kern="0">
+                          <a:solidFill>
+                            <a:srgbClr val="E4E1D8"/>
+                          </a:solidFill>
+                          <a:latin typeface="Be Vietnam Pro" pitchFamily="34" charset="0"/>
+                          <a:ea typeface="Be Vietnam Pro" pitchFamily="34" charset="-122"/>
+                          <a:cs typeface="Be Vietnam Pro" pitchFamily="34" charset="-120"/>
+                        </a:rPr>
+                        <a:t> web:</a:t>
+                      </a:r>
+                      <a:r>
                         <a:rPr lang="en-US" sz="2250" dirty="0" spc="11" kern="0">
                           <a:solidFill>
                             <a:srgbClr val="E4E1D8"/>
@@ -3585,7 +3607,7 @@
                         <a:t> gói</a:t>
                       </a:r>
                       <a:r>
-                        <a:rPr lang="en-US" sz="2250" dirty="0" spc="24" kern="0">
+                        <a:rPr lang="en-US" sz="2250" dirty="0" spc="25" kern="0">
                           <a:solidFill>
                             <a:srgbClr val="E4E1D8"/>
                           </a:solidFill>
@@ -3596,7 +3618,7 @@
                         <a:t> ứng</a:t>
                       </a:r>
                       <a:r>
-                        <a:rPr lang="en-US" sz="2250" dirty="0" spc="3" kern="0">
+                        <a:rPr lang="en-US" sz="2250" dirty="0" spc="2" kern="0">
                           <a:solidFill>
                             <a:srgbClr val="E4E1D8"/>
                           </a:solidFill>
@@ -3607,18 +3629,7 @@
                         <a:t> dụng</a:t>
                       </a:r>
                       <a:r>
-                        <a:rPr lang="en-US" sz="2250" dirty="0" spc="-11" kern="0">
-                          <a:solidFill>
-                            <a:srgbClr val="E4E1D8"/>
-                          </a:solidFill>
-                          <a:latin typeface="Be Vietnam Pro" pitchFamily="34" charset="0"/>
-                          <a:ea typeface="Be Vietnam Pro" pitchFamily="34" charset="-122"/>
-                          <a:cs typeface="Be Vietnam Pro" pitchFamily="34" charset="-120"/>
-                        </a:rPr>
-                        <a:t> web</a:t>
-                      </a:r>
-                      <a:r>
-                        <a:rPr lang="en-US" sz="2250" dirty="0" spc="-21" kern="0">
+                        <a:rPr lang="en-US" sz="2250" dirty="0" spc="-20" kern="0">
                           <a:solidFill>
                             <a:srgbClr val="E4E1D8"/>
                           </a:solidFill>

--- a/system-design-101/vi/lessons/sd-02-028/slides/sd-02-028.pptx
+++ b/system-design-101/vi/lessons/sd-02-028/slides/sd-02-028.pptx
@@ -13571,7 +13571,7 @@
               <a:buNone/>
             </a:pPr>
             <a:r>
-              <a:rPr lang="en-US" sz="2850" b="1" dirty="0" spc="-3" kern="0">
+              <a:rPr lang="en-US" sz="2850" b="1" dirty="0" spc="1" kern="0">
                 <a:solidFill>
                   <a:srgbClr val="F3EEE3"/>
                 </a:solidFill>
@@ -13579,7 +13579,95 @@
                 <a:ea typeface="Be Vietnam Pro" pitchFamily="34" charset="-122"/>
                 <a:cs typeface="Be Vietnam Pro" pitchFamily="34" charset="-120"/>
               </a:rPr>
-              <a:t>Ứng</a:t>
+              <a:t>Đổi</a:t>
+            </a:r>
+            <a:r>
+              <a:rPr lang="en-US" sz="2850" b="1" dirty="0" spc="21" kern="0">
+                <a:solidFill>
+                  <a:srgbClr val="F3EEE3"/>
+                </a:solidFill>
+                <a:latin typeface="Be Vietnam Pro" pitchFamily="34" charset="0"/>
+                <a:ea typeface="Be Vietnam Pro" pitchFamily="34" charset="-122"/>
+                <a:cs typeface="Be Vietnam Pro" pitchFamily="34" charset="-120"/>
+              </a:rPr>
+              <a:t> địa</a:t>
+            </a:r>
+            <a:r>
+              <a:rPr lang="en-US" sz="2850" b="1" dirty="0" spc="1" kern="0">
+                <a:solidFill>
+                  <a:srgbClr val="F3EEE3"/>
+                </a:solidFill>
+                <a:latin typeface="Be Vietnam Pro" pitchFamily="34" charset="0"/>
+                <a:ea typeface="Be Vietnam Pro" pitchFamily="34" charset="-122"/>
+                <a:cs typeface="Be Vietnam Pro" pitchFamily="34" charset="-120"/>
+              </a:rPr>
+              <a:t> chỉ</a:t>
+            </a:r>
+            <a:r>
+              <a:rPr lang="en-US" sz="2850" b="1" dirty="0" spc="-12" kern="0">
+                <a:solidFill>
+                  <a:srgbClr val="F3EEE3"/>
+                </a:solidFill>
+                <a:latin typeface="Be Vietnam Pro" pitchFamily="34" charset="0"/>
+                <a:ea typeface="Be Vietnam Pro" pitchFamily="34" charset="-122"/>
+                <a:cs typeface="Be Vietnam Pro" pitchFamily="34" charset="-120"/>
+              </a:rPr>
+              <a:t> hay</a:t>
+            </a:r>
+            <a:r>
+              <a:rPr lang="en-US" sz="2850" b="1" dirty="0" spc="2" kern="0">
+                <a:solidFill>
+                  <a:srgbClr val="F3EEE3"/>
+                </a:solidFill>
+                <a:latin typeface="Be Vietnam Pro" pitchFamily="34" charset="0"/>
+                <a:ea typeface="Be Vietnam Pro" pitchFamily="34" charset="-122"/>
+                <a:cs typeface="Be Vietnam Pro" pitchFamily="34" charset="-120"/>
+              </a:rPr>
+              <a:t> cách</a:t>
+            </a:r>
+            <a:r>
+              <a:rPr lang="en-US" sz="2850" b="1" dirty="0" spc="-14" kern="0">
+                <a:solidFill>
+                  <a:srgbClr val="F3EEE3"/>
+                </a:solidFill>
+                <a:latin typeface="Be Vietnam Pro" pitchFamily="34" charset="0"/>
+                <a:ea typeface="Be Vietnam Pro" pitchFamily="34" charset="-122"/>
+                <a:cs typeface="Be Vietnam Pro" pitchFamily="34" charset="-120"/>
+              </a:rPr>
+              <a:t> trả</a:t>
+            </a:r>
+            <a:r>
+              <a:rPr lang="en-US" sz="2850" b="1" dirty="0" spc="4" kern="0">
+                <a:solidFill>
+                  <a:srgbClr val="F3EEE3"/>
+                </a:solidFill>
+                <a:latin typeface="Be Vietnam Pro" pitchFamily="34" charset="0"/>
+                <a:ea typeface="Be Vietnam Pro" pitchFamily="34" charset="-122"/>
+                <a:cs typeface="Be Vietnam Pro" pitchFamily="34" charset="-120"/>
+              </a:rPr>
+              <a:t> lời:</a:t>
+            </a:r>
+            <a:r>
+              <a:rPr lang="en-US" sz="2850" b="1" dirty="0" spc="-9" kern="0">
+                <a:solidFill>
+                  <a:srgbClr val="F3EEE3"/>
+                </a:solidFill>
+                <a:latin typeface="Be Vietnam Pro" pitchFamily="34" charset="0"/>
+                <a:ea typeface="Be Vietnam Pro" pitchFamily="34" charset="-122"/>
+                <a:cs typeface="Be Vietnam Pro" pitchFamily="34" charset="-120"/>
+              </a:rPr>
+              <a:t> hỏng</a:t>
+            </a:r>
+            <a:r>
+              <a:rPr lang="en-US" sz="2850" b="1" dirty="0" spc="37" kern="0">
+                <a:solidFill>
+                  <a:srgbClr val="F3EEE3"/>
+                </a:solidFill>
+                <a:latin typeface="Be Vietnam Pro" pitchFamily="34" charset="0"/>
+                <a:ea typeface="Be Vietnam Pro" pitchFamily="34" charset="-122"/>
+                <a:cs typeface="Be Vietnam Pro" pitchFamily="34" charset="-120"/>
+              </a:rPr>
+              <a:t> ứng</a:t>
             </a:r>
             <a:r>
               <a:rPr lang="en-US" sz="2850" b="1" dirty="0" spc="0" kern="0">
@@ -13593,7 +13681,7 @@
               <a:t> dụng</a:t>
             </a:r>
             <a:r>
-              <a:rPr lang="en-US" sz="2850" b="1" dirty="0" spc="4" kern="0">
+              <a:rPr lang="en-US" sz="2850" b="1" dirty="0" spc="3" kern="0">
                 <a:solidFill>
                   <a:srgbClr val="F3EEE3"/>
                 </a:solidFill>
@@ -13602,50 +13690,6 @@
                 <a:cs typeface="Be Vietnam Pro" pitchFamily="34" charset="-120"/>
               </a:rPr>
               <a:t> cũ</a:t>
-            </a:r>
-            <a:r>
-              <a:rPr lang="en-US" sz="2850" b="1" dirty="0" spc="10" kern="0">
-                <a:solidFill>
-                  <a:srgbClr val="F3EEE3"/>
-                </a:solidFill>
-                <a:latin typeface="Be Vietnam Pro" pitchFamily="34" charset="0"/>
-                <a:ea typeface="Be Vietnam Pro" pitchFamily="34" charset="-122"/>
-                <a:cs typeface="Be Vietnam Pro" pitchFamily="34" charset="-120"/>
-              </a:rPr>
-              <a:t> đã</a:t>
-            </a:r>
-            <a:r>
-              <a:rPr lang="en-US" sz="2850" b="1" dirty="0" spc="2" kern="0">
-                <a:solidFill>
-                  <a:srgbClr val="F3EEE3"/>
-                </a:solidFill>
-                <a:latin typeface="Be Vietnam Pro" pitchFamily="34" charset="0"/>
-                <a:ea typeface="Be Vietnam Pro" pitchFamily="34" charset="-122"/>
-                <a:cs typeface="Be Vietnam Pro" pitchFamily="34" charset="-120"/>
-              </a:rPr>
-              <a:t> cài</a:t>
-            </a:r>
-            <a:r>
-              <a:rPr lang="en-US" sz="2850" b="1" dirty="0" spc="0" kern="0">
-                <a:solidFill>
-                  <a:srgbClr val="F3EEE3"/>
-                </a:solidFill>
-                <a:latin typeface="Be Vietnam Pro" pitchFamily="34" charset="0"/>
-                <a:ea typeface="Be Vietnam Pro" pitchFamily="34" charset="-122"/>
-                <a:cs typeface="Be Vietnam Pro" pitchFamily="34" charset="-120"/>
-              </a:rPr>
-              <a:t> sẽ</a:t>
-            </a:r>
-            <a:r>
-              <a:rPr lang="en-US" sz="2850" b="1" dirty="0" spc="-9" kern="0">
-                <a:solidFill>
-                  <a:srgbClr val="F3EEE3"/>
-                </a:solidFill>
-                <a:latin typeface="Be Vietnam Pro" pitchFamily="34" charset="0"/>
-                <a:ea typeface="Be Vietnam Pro" pitchFamily="34" charset="-122"/>
-                <a:cs typeface="Be Vietnam Pro" pitchFamily="34" charset="-120"/>
-              </a:rPr>
-              <a:t> hỏng</a:t>
             </a:r>
             <a:endParaRPr lang="en-US" sz="2850" dirty="0"/>
           </a:p>

--- a/system-design-101/vi/lessons/sd-02-028/slides/sd-02-028.pptx
+++ b/system-design-101/vi/lessons/sd-02-028/slides/sd-02-028.pptx
@@ -7640,6 +7640,39 @@
               <a:t>HÀNG</a:t>
             </a:r>
             <a:r>
+              <a:rPr lang="en-US" sz="1800" b="1" spc="223" kern="0" dirty="0">
+                <a:solidFill>
+                  <a:srgbClr val="B45309"/>
+                </a:solidFill>
+                <a:latin typeface="Be Vietnam Pro" pitchFamily="34" charset="0"/>
+                <a:ea typeface="Be Vietnam Pro" pitchFamily="34" charset="-122"/>
+                <a:cs typeface="Be Vietnam Pro" pitchFamily="34" charset="-120"/>
+              </a:rPr>
+              <a:t> TRĂM,</a:t>
+            </a:r>
+            <a:r>
+              <a:rPr lang="en-US" sz="1800" b="1" spc="227" kern="0" dirty="0">
+                <a:solidFill>
+                  <a:srgbClr val="B45309"/>
+                </a:solidFill>
+                <a:latin typeface="Be Vietnam Pro" pitchFamily="34" charset="0"/>
+                <a:ea typeface="Be Vietnam Pro" pitchFamily="34" charset="-122"/>
+                <a:cs typeface="Be Vietnam Pro" pitchFamily="34" charset="-120"/>
+              </a:rPr>
+              <a:t> CÓ</a:t>
+            </a:r>
+            <a:r>
+              <a:rPr lang="en-US" sz="1800" b="1" spc="226" kern="0" dirty="0">
+                <a:solidFill>
+                  <a:srgbClr val="B45309"/>
+                </a:solidFill>
+                <a:latin typeface="Be Vietnam Pro" pitchFamily="34" charset="0"/>
+                <a:ea typeface="Be Vietnam Pro" pitchFamily="34" charset="-122"/>
+                <a:cs typeface="Be Vietnam Pro" pitchFamily="34" charset="-120"/>
+              </a:rPr>
+              <a:t> THỂ</a:t>
+            </a:r>
+            <a:r>
               <a:rPr lang="en-US" sz="1800" b="1" spc="225" kern="0" dirty="0">
                 <a:solidFill>
                   <a:srgbClr val="B45309"/>
@@ -7649,28 +7682,6 @@
                 <a:cs typeface="Be Vietnam Pro" pitchFamily="34" charset="-120"/>
               </a:rPr>
               <a:t> NGHÌN</a:t>
-            </a:r>
-            <a:r>
-              <a:rPr lang="en-US" sz="1800" b="1" spc="227" kern="0" dirty="0">
-                <a:solidFill>
-                  <a:srgbClr val="B45309"/>
-                </a:solidFill>
-                <a:latin typeface="Be Vietnam Pro" pitchFamily="34" charset="0"/>
-                <a:ea typeface="Be Vietnam Pro" pitchFamily="34" charset="-122"/>
-                <a:cs typeface="Be Vietnam Pro" pitchFamily="34" charset="-120"/>
-              </a:rPr>
-              <a:t> DỊCH</a:t>
-            </a:r>
-            <a:r>
-              <a:rPr lang="en-US" sz="1800" b="1" spc="229" kern="0" dirty="0">
-                <a:solidFill>
-                  <a:srgbClr val="B45309"/>
-                </a:solidFill>
-                <a:latin typeface="Be Vietnam Pro" pitchFamily="34" charset="0"/>
-                <a:ea typeface="Be Vietnam Pro" pitchFamily="34" charset="-122"/>
-                <a:cs typeface="Be Vietnam Pro" pitchFamily="34" charset="-120"/>
-              </a:rPr>
-              <a:t> VỤ</a:t>
             </a:r>
             <a:endParaRPr lang="en-US" sz="1800" dirty="0"/>
           </a:p>
